--- a/examples/hello-table/fixtures/deck.msoffice-resaved.pptx
+++ b/examples/hello-table/fixtures/deck.msoffice-resaved.pptx
@@ -3324,7 +3324,7 @@
 
 <file path=ppt/slides/slide1.xml><?xml version="1.0" encoding="utf-8"?>
 <p:sld xmlns:a="http://schemas.openxmlformats.org/drawingml/2006/main" xmlns:r="http://schemas.openxmlformats.org/officeDocument/2006/relationships" xmlns:p="http://schemas.openxmlformats.org/presentationml/2006/main">
-  <p:cSld name="ox:b9f29acd-4be0-5345-b388-cb314338fa55">
+  <p:cSld name="mleaf:b9f29acd-4be0-5345-b388-cb314338fa55">
     <p:bg>
       <p:bgPr>
         <a:solidFill>
@@ -3349,7 +3349,7 @@
       </p:grpSpPr>
       <p:sp>
         <p:nvSpPr>
-          <p:cNvPr id="258" name="ox:ed7bca33-ef98-5495-a223-3046476144b1"/>
+          <p:cNvPr id="258" name="mleaf:ed7bca33-ef98-5495-a223-3046476144b1"/>
           <p:cNvSpPr/>
           <p:nvPr/>
         </p:nvSpPr>
@@ -3378,7 +3378,7 @@
       </p:sp>
       <p:sp>
         <p:nvSpPr>
-          <p:cNvPr id="259" name="ox:79cf7543-79e8-551e-992b-1899612ea818"/>
+          <p:cNvPr id="259" name="mleaf:79cf7543-79e8-551e-992b-1899612ea818"/>
           <p:cNvSpPr txBox="1"/>
           <p:nvPr/>
         </p:nvSpPr>
@@ -3418,7 +3418,7 @@
       </p:sp>
       <p:sp>
         <p:nvSpPr>
-          <p:cNvPr id="260" name="ox:b73a0317-a900-5035-8af5-41d456a76424"/>
+          <p:cNvPr id="260" name="mleaf:b73a0317-a900-5035-8af5-41d456a76424"/>
           <p:cNvSpPr txBox="1"/>
           <p:nvPr/>
         </p:nvSpPr>
@@ -3466,7 +3466,7 @@
 
 <file path=ppt/slides/slide2.xml><?xml version="1.0" encoding="utf-8"?>
 <p:sld xmlns:a="http://schemas.openxmlformats.org/drawingml/2006/main" xmlns:r="http://schemas.openxmlformats.org/officeDocument/2006/relationships" xmlns:p="http://schemas.openxmlformats.org/presentationml/2006/main">
-  <p:cSld name="ox:aa108021-6b33-5ae3-a0db-12b17e9592c4">
+  <p:cSld name="mleaf:aa108021-6b33-5ae3-a0db-12b17e9592c4">
     <p:bg>
       <p:bgPr>
         <a:solidFill>
@@ -3491,7 +3491,7 @@
       </p:grpSpPr>
       <p:sp>
         <p:nvSpPr>
-          <p:cNvPr id="262" name="ox:9b9cc37c-57d8-5294-896e-305ec1757883"/>
+          <p:cNvPr id="262" name="mleaf:9b9cc37c-57d8-5294-896e-305ec1757883"/>
           <p:cNvSpPr txBox="1"/>
           <p:nvPr/>
         </p:nvSpPr>
@@ -3531,7 +3531,7 @@
       </p:sp>
       <p:graphicFrame>
         <p:nvGraphicFramePr>
-          <p:cNvPr id="263" name="ox:987b7602-b694-53d2-b390-57f9d8ca3870"/>
+          <p:cNvPr id="263" name="mleaf:987b7602-b694-53d2-b390-57f9d8ca3870"/>
           <p:cNvGraphicFramePr>
             <a:graphicFrameLocks noGrp="1"/>
           </p:cNvGraphicFramePr>
@@ -3725,7 +3725,7 @@
       </p:graphicFrame>
       <p:graphicFrame>
         <p:nvGraphicFramePr>
-          <p:cNvPr id="264" name="ox:23ddaa1c-1c51-5324-8860-64ed833aa77f"/>
+          <p:cNvPr id="264" name="mleaf:23ddaa1c-1c51-5324-8860-64ed833aa77f"/>
           <p:cNvGraphicFramePr>
             <a:graphicFrameLocks noGrp="1"/>
           </p:cNvGraphicFramePr>
@@ -3743,7 +3743,7 @@
       </p:graphicFrame>
       <p:sp>
         <p:nvSpPr>
-          <p:cNvPr id="265" name="ox:1f3d316c-9724-5069-b314-93f167a63dbb"/>
+          <p:cNvPr id="265" name="mleaf:1f3d316c-9724-5069-b314-93f167a63dbb"/>
           <p:cNvSpPr txBox="1"/>
           <p:nvPr/>
         </p:nvSpPr>
@@ -3809,7 +3809,7 @@
 
 <file path=ppt/slides/slide3.xml><?xml version="1.0" encoding="utf-8"?>
 <p:sld xmlns:a="http://schemas.openxmlformats.org/drawingml/2006/main" xmlns:r="http://schemas.openxmlformats.org/officeDocument/2006/relationships" xmlns:p="http://schemas.openxmlformats.org/presentationml/2006/main">
-  <p:cSld name="ox:ad37e397-d236-5002-af7e-3682fbb922af">
+  <p:cSld name="mleaf:ad37e397-d236-5002-af7e-3682fbb922af">
     <p:bg>
       <p:bgPr>
         <a:solidFill>
@@ -3834,7 +3834,7 @@
       </p:grpSpPr>
       <p:sp>
         <p:nvSpPr>
-          <p:cNvPr id="267" name="ox:5b80e2c4-11e9-59eb-ba28-26372e59d240"/>
+          <p:cNvPr id="267" name="mleaf:5b80e2c4-11e9-59eb-ba28-26372e59d240"/>
           <p:cNvSpPr txBox="1"/>
           <p:nvPr/>
         </p:nvSpPr>
@@ -3874,7 +3874,7 @@
       </p:sp>
       <p:sp>
         <p:nvSpPr>
-          <p:cNvPr id="268" name="ox:fe7234e8-6154-5a93-9672-691664c55a4c"/>
+          <p:cNvPr id="268" name="mleaf:fe7234e8-6154-5a93-9672-691664c55a4c"/>
           <p:cNvSpPr txBox="1"/>
           <p:nvPr/>
         </p:nvSpPr>
@@ -3965,7 +3965,7 @@
       </p:sp>
       <p:pic>
         <p:nvPicPr>
-          <p:cNvPr id="269" name="ox:3dd13f43-6346-534e-a04d-fb73fa6e8967"/>
+          <p:cNvPr id="269" name="mleaf:3dd13f43-6346-534e-a04d-fb73fa6e8967"/>
           <p:cNvPicPr>
             <a:picLocks noChangeAspect="1"/>
           </p:cNvPicPr>

--- a/examples/hello-table/fixtures/deck.msoffice-resaved.pptx
+++ b/examples/hello-table/fixtures/deck.msoffice-resaved.pptx
@@ -176,7 +176,7 @@
           </c:val>
           <c:extLst>
             <c:ext xmlns:c16="http://schemas.microsoft.com/office/drawing/2014/chart" uri="{C3380CC4-5D6E-409C-BE32-E72D297353CC}">
-              <c16:uniqueId val="{00000000-EE35-2B43-9F52-5881FF286F2A}"/>
+              <c16:uniqueId val="{00000000-87F0-DD4F-B094-EFA84DFFE421}"/>
             </c:ext>
           </c:extLst>
         </c:ser>
